--- a/bright-31-flyer.pptx
+++ b/bright-31-flyer.pptx
@@ -3088,20 +3088,12 @@
         <p:nvPr/>
       </p:nvGrpSpPr>
       <p:grpSpPr/>
-      <p:pic>
-        <p:nvPicPr>
-          <p:cNvPr id="2" name="Picture 1" descr="bright-31-flyer.png"/>
-          <p:cNvPicPr>
-            <a:picLocks noChangeAspect="1"/>
-          </p:cNvPicPr>
+      <p:sp>
+        <p:nvSpPr>
+          <p:cNvPr id="2" name="Rectangle 1"/>
+          <p:cNvSpPr/>
           <p:nvPr/>
-        </p:nvPicPr>
-        <p:blipFill>
-          <a:blip r:embed="rId2"/>
-          <a:stretch>
-            <a:fillRect/>
-          </a:stretch>
-        </p:blipFill>
+        </p:nvSpPr>
         <p:spPr>
           <a:xfrm>
             <a:off x="0" y="0"/>
@@ -3110,8 +3102,1207 @@
           <a:prstGeom prst="rect">
             <a:avLst/>
           </a:prstGeom>
-        </p:spPr>
-      </p:pic>
+          <a:solidFill>
+            <a:srgbClr val="FBFAF7"/>
+          </a:solidFill>
+          <a:ln>
+            <a:noFill/>
+          </a:ln>
+          <a:effectLst/>
+        </p:spPr>
+        <p:style>
+          <a:lnRef idx="1">
+            <a:schemeClr val="accent1"/>
+          </a:lnRef>
+          <a:fillRef idx="3">
+            <a:schemeClr val="accent1"/>
+          </a:fillRef>
+          <a:effectRef idx="2">
+            <a:schemeClr val="accent1"/>
+          </a:effectRef>
+          <a:fontRef idx="minor">
+            <a:schemeClr val="lt1"/>
+          </a:fontRef>
+        </p:style>
+        <p:txBody>
+          <a:bodyPr rtlCol="0" anchor="ctr"/>
+          <a:lstStyle/>
+          <a:p>
+            <a:pPr algn="ctr"/>
+          </a:p>
+        </p:txBody>
+      </p:sp>
+      <p:sp>
+        <p:nvSpPr>
+          <p:cNvPr id="3" name="Rectangle 2"/>
+          <p:cNvSpPr/>
+          <p:nvPr/>
+        </p:nvSpPr>
+        <p:spPr>
+          <a:xfrm>
+            <a:off x="4716214" y="885825"/>
+            <a:ext cx="571500" cy="9525"/>
+          </a:xfrm>
+          <a:prstGeom prst="rect">
+            <a:avLst/>
+          </a:prstGeom>
+          <a:solidFill>
+            <a:srgbClr val="97A98C"/>
+          </a:solidFill>
+          <a:ln>
+            <a:noFill/>
+          </a:ln>
+          <a:effectLst/>
+        </p:spPr>
+        <p:style>
+          <a:lnRef idx="1">
+            <a:schemeClr val="accent1"/>
+          </a:lnRef>
+          <a:fillRef idx="3">
+            <a:schemeClr val="accent1"/>
+          </a:fillRef>
+          <a:effectRef idx="2">
+            <a:schemeClr val="accent1"/>
+          </a:effectRef>
+          <a:fontRef idx="minor">
+            <a:schemeClr val="lt1"/>
+          </a:fontRef>
+        </p:style>
+        <p:txBody>
+          <a:bodyPr rtlCol="0" anchor="ctr"/>
+          <a:lstStyle/>
+          <a:p>
+            <a:pPr algn="ctr"/>
+          </a:p>
+        </p:txBody>
+      </p:sp>
+      <p:sp>
+        <p:nvSpPr>
+          <p:cNvPr id="4" name="Rectangle 3"/>
+          <p:cNvSpPr/>
+          <p:nvPr/>
+        </p:nvSpPr>
+        <p:spPr>
+          <a:xfrm>
+            <a:off x="6856512" y="885825"/>
+            <a:ext cx="571500" cy="9525"/>
+          </a:xfrm>
+          <a:prstGeom prst="rect">
+            <a:avLst/>
+          </a:prstGeom>
+          <a:solidFill>
+            <a:srgbClr val="97A98C"/>
+          </a:solidFill>
+          <a:ln>
+            <a:noFill/>
+          </a:ln>
+          <a:effectLst/>
+        </p:spPr>
+        <p:style>
+          <a:lnRef idx="1">
+            <a:schemeClr val="accent1"/>
+          </a:lnRef>
+          <a:fillRef idx="3">
+            <a:schemeClr val="accent1"/>
+          </a:fillRef>
+          <a:effectRef idx="2">
+            <a:schemeClr val="accent1"/>
+          </a:effectRef>
+          <a:fontRef idx="minor">
+            <a:schemeClr val="lt1"/>
+          </a:fontRef>
+        </p:style>
+        <p:txBody>
+          <a:bodyPr rtlCol="0" anchor="ctr"/>
+          <a:lstStyle/>
+          <a:p>
+            <a:pPr algn="ctr"/>
+          </a:p>
+        </p:txBody>
+      </p:sp>
+      <p:sp>
+        <p:nvSpPr>
+          <p:cNvPr id="5" name="Rectangle 4"/>
+          <p:cNvSpPr/>
+          <p:nvPr/>
+        </p:nvSpPr>
+        <p:spPr>
+          <a:xfrm>
+            <a:off x="762000" y="2671762"/>
+            <a:ext cx="10620375" cy="5334000"/>
+          </a:xfrm>
+          <a:prstGeom prst="rect">
+            <a:avLst/>
+          </a:prstGeom>
+          <a:solidFill>
+            <a:srgbClr val="EDE7DD"/>
+          </a:solidFill>
+          <a:ln>
+            <a:noFill/>
+          </a:ln>
+          <a:effectLst/>
+        </p:spPr>
+        <p:style>
+          <a:lnRef idx="1">
+            <a:schemeClr val="accent1"/>
+          </a:lnRef>
+          <a:fillRef idx="3">
+            <a:schemeClr val="accent1"/>
+          </a:fillRef>
+          <a:effectRef idx="2">
+            <a:schemeClr val="accent1"/>
+          </a:effectRef>
+          <a:fontRef idx="minor">
+            <a:schemeClr val="lt1"/>
+          </a:fontRef>
+        </p:style>
+        <p:txBody>
+          <a:bodyPr rtlCol="0" anchor="ctr"/>
+          <a:lstStyle/>
+          <a:p>
+            <a:pPr algn="ctr"/>
+          </a:p>
+        </p:txBody>
+      </p:sp>
+      <p:sp>
+        <p:nvSpPr>
+          <p:cNvPr id="6" name="Rectangle 5"/>
+          <p:cNvSpPr/>
+          <p:nvPr/>
+        </p:nvSpPr>
+        <p:spPr>
+          <a:xfrm>
+            <a:off x="762000" y="2671762"/>
+            <a:ext cx="10620375" cy="9525"/>
+          </a:xfrm>
+          <a:prstGeom prst="rect">
+            <a:avLst/>
+          </a:prstGeom>
+          <a:solidFill>
+            <a:srgbClr val="CED6C7"/>
+          </a:solidFill>
+          <a:ln>
+            <a:noFill/>
+          </a:ln>
+          <a:effectLst/>
+        </p:spPr>
+        <p:style>
+          <a:lnRef idx="1">
+            <a:schemeClr val="accent1"/>
+          </a:lnRef>
+          <a:fillRef idx="3">
+            <a:schemeClr val="accent1"/>
+          </a:fillRef>
+          <a:effectRef idx="2">
+            <a:schemeClr val="accent1"/>
+          </a:effectRef>
+          <a:fontRef idx="minor">
+            <a:schemeClr val="lt1"/>
+          </a:fontRef>
+        </p:style>
+        <p:txBody>
+          <a:bodyPr rtlCol="0" anchor="ctr"/>
+          <a:lstStyle/>
+          <a:p>
+            <a:pPr algn="ctr"/>
+          </a:p>
+        </p:txBody>
+      </p:sp>
+      <p:sp>
+        <p:nvSpPr>
+          <p:cNvPr id="7" name="Rectangle 6"/>
+          <p:cNvSpPr/>
+          <p:nvPr/>
+        </p:nvSpPr>
+        <p:spPr>
+          <a:xfrm>
+            <a:off x="762000" y="7996238"/>
+            <a:ext cx="10620375" cy="9525"/>
+          </a:xfrm>
+          <a:prstGeom prst="rect">
+            <a:avLst/>
+          </a:prstGeom>
+          <a:solidFill>
+            <a:srgbClr val="CED6C7"/>
+          </a:solidFill>
+          <a:ln>
+            <a:noFill/>
+          </a:ln>
+          <a:effectLst/>
+        </p:spPr>
+        <p:style>
+          <a:lnRef idx="1">
+            <a:schemeClr val="accent1"/>
+          </a:lnRef>
+          <a:fillRef idx="3">
+            <a:schemeClr val="accent1"/>
+          </a:fillRef>
+          <a:effectRef idx="2">
+            <a:schemeClr val="accent1"/>
+          </a:effectRef>
+          <a:fontRef idx="minor">
+            <a:schemeClr val="lt1"/>
+          </a:fontRef>
+        </p:style>
+        <p:txBody>
+          <a:bodyPr rtlCol="0" anchor="ctr"/>
+          <a:lstStyle/>
+          <a:p>
+            <a:pPr algn="ctr"/>
+          </a:p>
+        </p:txBody>
+      </p:sp>
+      <p:sp>
+        <p:nvSpPr>
+          <p:cNvPr id="8" name="Rectangle 7"/>
+          <p:cNvSpPr/>
+          <p:nvPr/>
+        </p:nvSpPr>
+        <p:spPr>
+          <a:xfrm>
+            <a:off x="762000" y="2671762"/>
+            <a:ext cx="9525" cy="5334000"/>
+          </a:xfrm>
+          <a:prstGeom prst="rect">
+            <a:avLst/>
+          </a:prstGeom>
+          <a:solidFill>
+            <a:srgbClr val="CED6C7"/>
+          </a:solidFill>
+          <a:ln>
+            <a:noFill/>
+          </a:ln>
+          <a:effectLst/>
+        </p:spPr>
+        <p:style>
+          <a:lnRef idx="1">
+            <a:schemeClr val="accent1"/>
+          </a:lnRef>
+          <a:fillRef idx="3">
+            <a:schemeClr val="accent1"/>
+          </a:fillRef>
+          <a:effectRef idx="2">
+            <a:schemeClr val="accent1"/>
+          </a:effectRef>
+          <a:fontRef idx="minor">
+            <a:schemeClr val="lt1"/>
+          </a:fontRef>
+        </p:style>
+        <p:txBody>
+          <a:bodyPr rtlCol="0" anchor="ctr"/>
+          <a:lstStyle/>
+          <a:p>
+            <a:pPr algn="ctr"/>
+          </a:p>
+        </p:txBody>
+      </p:sp>
+      <p:sp>
+        <p:nvSpPr>
+          <p:cNvPr id="9" name="Rectangle 8"/>
+          <p:cNvSpPr/>
+          <p:nvPr/>
+        </p:nvSpPr>
+        <p:spPr>
+          <a:xfrm>
+            <a:off x="11372850" y="2671762"/>
+            <a:ext cx="9525" cy="5334000"/>
+          </a:xfrm>
+          <a:prstGeom prst="rect">
+            <a:avLst/>
+          </a:prstGeom>
+          <a:solidFill>
+            <a:srgbClr val="CED6C7"/>
+          </a:solidFill>
+          <a:ln>
+            <a:noFill/>
+          </a:ln>
+          <a:effectLst/>
+        </p:spPr>
+        <p:style>
+          <a:lnRef idx="1">
+            <a:schemeClr val="accent1"/>
+          </a:lnRef>
+          <a:fillRef idx="3">
+            <a:schemeClr val="accent1"/>
+          </a:fillRef>
+          <a:effectRef idx="2">
+            <a:schemeClr val="accent1"/>
+          </a:effectRef>
+          <a:fontRef idx="minor">
+            <a:schemeClr val="lt1"/>
+          </a:fontRef>
+        </p:style>
+        <p:txBody>
+          <a:bodyPr rtlCol="0" anchor="ctr"/>
+          <a:lstStyle/>
+          <a:p>
+            <a:pPr algn="ctr"/>
+          </a:p>
+        </p:txBody>
+      </p:sp>
+      <p:sp>
+        <p:nvSpPr>
+          <p:cNvPr id="10" name="Rectangle 9"/>
+          <p:cNvSpPr/>
+          <p:nvPr/>
+        </p:nvSpPr>
+        <p:spPr>
+          <a:xfrm>
+            <a:off x="762000" y="9472612"/>
+            <a:ext cx="10620375" cy="9525"/>
+          </a:xfrm>
+          <a:prstGeom prst="rect">
+            <a:avLst/>
+          </a:prstGeom>
+          <a:solidFill>
+            <a:srgbClr val="C9D2C2"/>
+          </a:solidFill>
+          <a:ln>
+            <a:noFill/>
+          </a:ln>
+          <a:effectLst/>
+        </p:spPr>
+        <p:style>
+          <a:lnRef idx="1">
+            <a:schemeClr val="accent1"/>
+          </a:lnRef>
+          <a:fillRef idx="3">
+            <a:schemeClr val="accent1"/>
+          </a:fillRef>
+          <a:effectRef idx="2">
+            <a:schemeClr val="accent1"/>
+          </a:effectRef>
+          <a:fontRef idx="minor">
+            <a:schemeClr val="lt1"/>
+          </a:fontRef>
+        </p:style>
+        <p:txBody>
+          <a:bodyPr rtlCol="0" anchor="ctr"/>
+          <a:lstStyle/>
+          <a:p>
+            <a:pPr algn="ctr"/>
+          </a:p>
+        </p:txBody>
+      </p:sp>
+      <p:sp>
+        <p:nvSpPr>
+          <p:cNvPr id="11" name="Rectangle 10"/>
+          <p:cNvSpPr/>
+          <p:nvPr/>
+        </p:nvSpPr>
+        <p:spPr>
+          <a:xfrm>
+            <a:off x="762000" y="10615612"/>
+            <a:ext cx="10620375" cy="9525"/>
+          </a:xfrm>
+          <a:prstGeom prst="rect">
+            <a:avLst/>
+          </a:prstGeom>
+          <a:solidFill>
+            <a:srgbClr val="C9D2C2"/>
+          </a:solidFill>
+          <a:ln>
+            <a:noFill/>
+          </a:ln>
+          <a:effectLst/>
+        </p:spPr>
+        <p:style>
+          <a:lnRef idx="1">
+            <a:schemeClr val="accent1"/>
+          </a:lnRef>
+          <a:fillRef idx="3">
+            <a:schemeClr val="accent1"/>
+          </a:fillRef>
+          <a:effectRef idx="2">
+            <a:schemeClr val="accent1"/>
+          </a:effectRef>
+          <a:fontRef idx="minor">
+            <a:schemeClr val="lt1"/>
+          </a:fontRef>
+        </p:style>
+        <p:txBody>
+          <a:bodyPr rtlCol="0" anchor="ctr"/>
+          <a:lstStyle/>
+          <a:p>
+            <a:pPr algn="ctr"/>
+          </a:p>
+        </p:txBody>
+      </p:sp>
+      <p:sp>
+        <p:nvSpPr>
+          <p:cNvPr id="12" name="Rectangle 11"/>
+          <p:cNvSpPr/>
+          <p:nvPr/>
+        </p:nvSpPr>
+        <p:spPr>
+          <a:xfrm>
+            <a:off x="762000" y="14297025"/>
+            <a:ext cx="10620375" cy="9525"/>
+          </a:xfrm>
+          <a:prstGeom prst="rect">
+            <a:avLst/>
+          </a:prstGeom>
+          <a:solidFill>
+            <a:srgbClr val="C9D2C2"/>
+          </a:solidFill>
+          <a:ln>
+            <a:noFill/>
+          </a:ln>
+          <a:effectLst/>
+        </p:spPr>
+        <p:style>
+          <a:lnRef idx="1">
+            <a:schemeClr val="accent1"/>
+          </a:lnRef>
+          <a:fillRef idx="3">
+            <a:schemeClr val="accent1"/>
+          </a:fillRef>
+          <a:effectRef idx="2">
+            <a:schemeClr val="accent1"/>
+          </a:effectRef>
+          <a:fontRef idx="minor">
+            <a:schemeClr val="lt1"/>
+          </a:fontRef>
+        </p:style>
+        <p:txBody>
+          <a:bodyPr rtlCol="0" anchor="ctr"/>
+          <a:lstStyle/>
+          <a:p>
+            <a:pPr algn="ctr"/>
+          </a:p>
+        </p:txBody>
+      </p:sp>
+      <p:sp>
+        <p:nvSpPr>
+          <p:cNvPr id="13" name="Oval 12"/>
+          <p:cNvSpPr/>
+          <p:nvPr/>
+        </p:nvSpPr>
+        <p:spPr>
+          <a:xfrm>
+            <a:off x="762000" y="14535150"/>
+            <a:ext cx="419100" cy="419100"/>
+          </a:xfrm>
+          <a:prstGeom prst="ellipse">
+            <a:avLst/>
+          </a:prstGeom>
+          <a:noFill/>
+          <a:ln w="9525">
+            <a:solidFill>
+              <a:srgbClr val="97A98C"/>
+            </a:solidFill>
+          </a:ln>
+          <a:effectLst/>
+        </p:spPr>
+        <p:style>
+          <a:lnRef idx="1">
+            <a:schemeClr val="accent1"/>
+          </a:lnRef>
+          <a:fillRef idx="3">
+            <a:schemeClr val="accent1"/>
+          </a:fillRef>
+          <a:effectRef idx="2">
+            <a:schemeClr val="accent1"/>
+          </a:effectRef>
+          <a:fontRef idx="minor">
+            <a:schemeClr val="lt1"/>
+          </a:fontRef>
+        </p:style>
+        <p:txBody>
+          <a:bodyPr rtlCol="0" anchor="ctr"/>
+          <a:lstStyle/>
+          <a:p>
+            <a:pPr algn="ctr"/>
+          </a:p>
+        </p:txBody>
+      </p:sp>
+      <p:sp>
+        <p:nvSpPr>
+          <p:cNvPr id="14" name="TextBox 13"/>
+          <p:cNvSpPr txBox="1"/>
+          <p:nvPr/>
+        </p:nvSpPr>
+        <p:spPr>
+          <a:xfrm>
+            <a:off x="4931375" y="804862"/>
+            <a:ext cx="2281476" cy="171450"/>
+          </a:xfrm>
+          <a:prstGeom prst="rect">
+            <a:avLst/>
+          </a:prstGeom>
+          <a:noFill/>
+        </p:spPr>
+        <p:txBody>
+          <a:bodyPr wrap="none" anchor="t" lIns="0" rIns="0" tIns="0" bIns="0"/>
+          <a:lstStyle/>
+          <a:p>
+            <a:pPr algn="ctr"/>
+            <a:r>
+              <a:rPr sz="900" i="0" b="0" spc="378">
+                <a:solidFill>
+                  <a:srgbClr val="97A98C"/>
+                </a:solidFill>
+                <a:latin typeface="Poppins"/>
+                <a:ea typeface="Poppins"/>
+                <a:cs typeface="Poppins"/>
+              </a:rPr>
+              <a:t>OPEN HOUSE</a:t>
+            </a:r>
+          </a:p>
+        </p:txBody>
+      </p:sp>
+      <p:sp>
+        <p:nvSpPr>
+          <p:cNvPr id="15" name="TextBox 14"/>
+          <p:cNvSpPr txBox="1"/>
+          <p:nvPr/>
+        </p:nvSpPr>
+        <p:spPr>
+          <a:xfrm>
+            <a:off x="-2614612" y="1204912"/>
+            <a:ext cx="17373600" cy="1085850"/>
+          </a:xfrm>
+          <a:prstGeom prst="rect">
+            <a:avLst/>
+          </a:prstGeom>
+          <a:noFill/>
+        </p:spPr>
+        <p:txBody>
+          <a:bodyPr wrap="none" anchor="t" lIns="0" rIns="0" tIns="0" bIns="0"/>
+          <a:lstStyle/>
+          <a:p>
+            <a:pPr algn="ctr">
+              <a:lnSpc>
+                <a:spcPct val="95000"/>
+              </a:lnSpc>
+            </a:pPr>
+            <a:r>
+              <a:rPr sz="9000" i="1" b="0">
+                <a:solidFill>
+                  <a:srgbClr val="33322E"/>
+                </a:solidFill>
+                <a:latin typeface="Cormorant Garamond"/>
+                <a:ea typeface="Cormorant Garamond"/>
+                <a:cs typeface="Cormorant Garamond"/>
+              </a:rPr>
+              <a:t>You’re Invited</a:t>
+            </a:r>
+          </a:p>
+        </p:txBody>
+      </p:sp>
+      <p:sp>
+        <p:nvSpPr>
+          <p:cNvPr id="16" name="TextBox 15"/>
+          <p:cNvSpPr txBox="1"/>
+          <p:nvPr/>
+        </p:nvSpPr>
+        <p:spPr>
+          <a:xfrm>
+            <a:off x="5349180" y="5253038"/>
+            <a:ext cx="2694384" cy="171450"/>
+          </a:xfrm>
+          <a:prstGeom prst="rect">
+            <a:avLst/>
+          </a:prstGeom>
+          <a:noFill/>
+        </p:spPr>
+        <p:txBody>
+          <a:bodyPr wrap="none" anchor="t" lIns="0" rIns="0" tIns="0" bIns="0"/>
+          <a:lstStyle/>
+          <a:p>
+            <a:pPr algn="l"/>
+            <a:r>
+              <a:rPr sz="900" i="0" b="0" spc="270">
+                <a:solidFill>
+                  <a:srgbClr val="8A867E"/>
+                </a:solidFill>
+                <a:latin typeface="Poppins"/>
+                <a:ea typeface="Poppins"/>
+                <a:cs typeface="Poppins"/>
+              </a:rPr>
+              <a:t>PROPERTY PHOTO</a:t>
+            </a:r>
+          </a:p>
+        </p:txBody>
+      </p:sp>
+      <p:sp>
+        <p:nvSpPr>
+          <p:cNvPr id="17" name="TextBox 16"/>
+          <p:cNvSpPr txBox="1"/>
+          <p:nvPr/>
+        </p:nvSpPr>
+        <p:spPr>
+          <a:xfrm>
+            <a:off x="762000" y="8386762"/>
+            <a:ext cx="5458063" cy="485775"/>
+          </a:xfrm>
+          <a:prstGeom prst="rect">
+            <a:avLst/>
+          </a:prstGeom>
+          <a:noFill/>
+        </p:spPr>
+        <p:txBody>
+          <a:bodyPr wrap="none" anchor="t" lIns="0" rIns="0" tIns="0" bIns="0"/>
+          <a:lstStyle/>
+          <a:p>
+            <a:pPr algn="l"/>
+            <a:r>
+              <a:rPr sz="3300" i="0" b="0">
+                <a:solidFill>
+                  <a:srgbClr val="33322E"/>
+                </a:solidFill>
+                <a:latin typeface="Cormorant Garamond"/>
+                <a:ea typeface="Cormorant Garamond"/>
+                <a:cs typeface="Cormorant Garamond"/>
+              </a:rPr>
+              <a:t>117 Larkspur Lane</a:t>
+            </a:r>
+          </a:p>
+        </p:txBody>
+      </p:sp>
+      <p:sp>
+        <p:nvSpPr>
+          <p:cNvPr id="18" name="TextBox 17"/>
+          <p:cNvSpPr txBox="1"/>
+          <p:nvPr/>
+        </p:nvSpPr>
+        <p:spPr>
+          <a:xfrm>
+            <a:off x="762000" y="8948738"/>
+            <a:ext cx="5458063" cy="200025"/>
+          </a:xfrm>
+          <a:prstGeom prst="rect">
+            <a:avLst/>
+          </a:prstGeom>
+          <a:noFill/>
+        </p:spPr>
+        <p:txBody>
+          <a:bodyPr wrap="none" anchor="t" lIns="0" rIns="0" tIns="0" bIns="0"/>
+          <a:lstStyle/>
+          <a:p>
+            <a:pPr algn="l"/>
+            <a:r>
+              <a:rPr sz="1050" i="0" b="0" spc="210">
+                <a:solidFill>
+                  <a:srgbClr val="8A867E"/>
+                </a:solidFill>
+                <a:latin typeface="Poppins"/>
+                <a:ea typeface="Poppins"/>
+                <a:cs typeface="Poppins"/>
+              </a:rPr>
+              <a:t>AUSTIN, TX</a:t>
+            </a:r>
+          </a:p>
+        </p:txBody>
+      </p:sp>
+      <p:sp>
+        <p:nvSpPr>
+          <p:cNvPr id="19" name="TextBox 18"/>
+          <p:cNvSpPr txBox="1"/>
+          <p:nvPr/>
+        </p:nvSpPr>
+        <p:spPr>
+          <a:xfrm>
+            <a:off x="9453562" y="8558212"/>
+            <a:ext cx="3467100" cy="590550"/>
+          </a:xfrm>
+          <a:prstGeom prst="rect">
+            <a:avLst/>
+          </a:prstGeom>
+          <a:noFill/>
+        </p:spPr>
+        <p:txBody>
+          <a:bodyPr wrap="none" anchor="t" lIns="0" rIns="0" tIns="0" bIns="0"/>
+          <a:lstStyle/>
+          <a:p>
+            <a:pPr algn="l"/>
+            <a:r>
+              <a:rPr sz="4050" i="0" b="1">
+                <a:solidFill>
+                  <a:srgbClr val="97A98C"/>
+                </a:solidFill>
+                <a:latin typeface="Cormorant Garamond"/>
+                <a:ea typeface="Cormorant Garamond"/>
+                <a:cs typeface="Cormorant Garamond"/>
+              </a:rPr>
+              <a:t>$740,000</a:t>
+            </a:r>
+          </a:p>
+        </p:txBody>
+      </p:sp>
+      <p:sp>
+        <p:nvSpPr>
+          <p:cNvPr id="20" name="TextBox 19"/>
+          <p:cNvSpPr txBox="1"/>
+          <p:nvPr/>
+        </p:nvSpPr>
+        <p:spPr>
+          <a:xfrm>
+            <a:off x="1539701" y="9729788"/>
+            <a:ext cx="908447" cy="447675"/>
+          </a:xfrm>
+          <a:prstGeom prst="rect">
+            <a:avLst/>
+          </a:prstGeom>
+          <a:noFill/>
+        </p:spPr>
+        <p:txBody>
+          <a:bodyPr wrap="none" anchor="t" lIns="0" rIns="0" tIns="0" bIns="0"/>
+          <a:lstStyle/>
+          <a:p>
+            <a:pPr algn="ctr"/>
+            <a:r>
+              <a:rPr sz="3000" i="0" b="0">
+                <a:solidFill>
+                  <a:srgbClr val="33322E"/>
+                </a:solidFill>
+                <a:latin typeface="Cormorant Garamond"/>
+                <a:ea typeface="Cormorant Garamond"/>
+                <a:cs typeface="Cormorant Garamond"/>
+              </a:rPr>
+              <a:t>4</a:t>
+            </a:r>
+          </a:p>
+        </p:txBody>
+      </p:sp>
+      <p:sp>
+        <p:nvSpPr>
+          <p:cNvPr id="21" name="TextBox 20"/>
+          <p:cNvSpPr txBox="1"/>
+          <p:nvPr/>
+        </p:nvSpPr>
+        <p:spPr>
+          <a:xfrm>
+            <a:off x="1539701" y="10215562"/>
+            <a:ext cx="908447" cy="152400"/>
+          </a:xfrm>
+          <a:prstGeom prst="rect">
+            <a:avLst/>
+          </a:prstGeom>
+          <a:noFill/>
+        </p:spPr>
+        <p:txBody>
+          <a:bodyPr wrap="none" anchor="t" lIns="0" rIns="0" tIns="0" bIns="0"/>
+          <a:lstStyle/>
+          <a:p>
+            <a:pPr algn="ctr"/>
+            <a:r>
+              <a:rPr sz="750" i="0" b="0" spc="195">
+                <a:solidFill>
+                  <a:srgbClr val="8A867E"/>
+                </a:solidFill>
+                <a:latin typeface="Poppins"/>
+                <a:ea typeface="Poppins"/>
+                <a:cs typeface="Poppins"/>
+              </a:rPr>
+              <a:t>BEDS</a:t>
+            </a:r>
+          </a:p>
+        </p:txBody>
+      </p:sp>
+      <p:sp>
+        <p:nvSpPr>
+          <p:cNvPr id="22" name="TextBox 21"/>
+          <p:cNvSpPr txBox="1"/>
+          <p:nvPr/>
+        </p:nvSpPr>
+        <p:spPr>
+          <a:xfrm>
+            <a:off x="3976643" y="9729788"/>
+            <a:ext cx="1052751" cy="447675"/>
+          </a:xfrm>
+          <a:prstGeom prst="rect">
+            <a:avLst/>
+          </a:prstGeom>
+          <a:noFill/>
+        </p:spPr>
+        <p:txBody>
+          <a:bodyPr wrap="none" anchor="t" lIns="0" rIns="0" tIns="0" bIns="0"/>
+          <a:lstStyle/>
+          <a:p>
+            <a:pPr algn="ctr"/>
+            <a:r>
+              <a:rPr sz="3000" i="0" b="0">
+                <a:solidFill>
+                  <a:srgbClr val="33322E"/>
+                </a:solidFill>
+                <a:latin typeface="Cormorant Garamond"/>
+                <a:ea typeface="Cormorant Garamond"/>
+                <a:cs typeface="Cormorant Garamond"/>
+              </a:rPr>
+              <a:t>3</a:t>
+            </a:r>
+          </a:p>
+        </p:txBody>
+      </p:sp>
+      <p:sp>
+        <p:nvSpPr>
+          <p:cNvPr id="23" name="TextBox 22"/>
+          <p:cNvSpPr txBox="1"/>
+          <p:nvPr/>
+        </p:nvSpPr>
+        <p:spPr>
+          <a:xfrm>
+            <a:off x="3976643" y="10215562"/>
+            <a:ext cx="1052751" cy="152400"/>
+          </a:xfrm>
+          <a:prstGeom prst="rect">
+            <a:avLst/>
+          </a:prstGeom>
+          <a:noFill/>
+        </p:spPr>
+        <p:txBody>
+          <a:bodyPr wrap="none" anchor="t" lIns="0" rIns="0" tIns="0" bIns="0"/>
+          <a:lstStyle/>
+          <a:p>
+            <a:pPr algn="ctr"/>
+            <a:r>
+              <a:rPr sz="750" i="0" b="0" spc="195">
+                <a:solidFill>
+                  <a:srgbClr val="8A867E"/>
+                </a:solidFill>
+                <a:latin typeface="Poppins"/>
+                <a:ea typeface="Poppins"/>
+                <a:cs typeface="Poppins"/>
+              </a:rPr>
+              <a:t>BATHS</a:t>
+            </a:r>
+          </a:p>
+        </p:txBody>
+      </p:sp>
+      <p:sp>
+        <p:nvSpPr>
+          <p:cNvPr id="24" name="TextBox 23"/>
+          <p:cNvSpPr txBox="1"/>
+          <p:nvPr/>
+        </p:nvSpPr>
+        <p:spPr>
+          <a:xfrm>
+            <a:off x="6399609" y="9729788"/>
+            <a:ext cx="1752600" cy="447675"/>
+          </a:xfrm>
+          <a:prstGeom prst="rect">
+            <a:avLst/>
+          </a:prstGeom>
+          <a:noFill/>
+        </p:spPr>
+        <p:txBody>
+          <a:bodyPr wrap="none" anchor="t" lIns="0" rIns="0" tIns="0" bIns="0"/>
+          <a:lstStyle/>
+          <a:p>
+            <a:pPr algn="ctr"/>
+            <a:r>
+              <a:rPr sz="3000" i="0" b="0">
+                <a:solidFill>
+                  <a:srgbClr val="33322E"/>
+                </a:solidFill>
+                <a:latin typeface="Cormorant Garamond"/>
+                <a:ea typeface="Cormorant Garamond"/>
+                <a:cs typeface="Cormorant Garamond"/>
+              </a:rPr>
+              <a:t>2,480</a:t>
+            </a:r>
+          </a:p>
+        </p:txBody>
+      </p:sp>
+      <p:sp>
+        <p:nvSpPr>
+          <p:cNvPr id="25" name="TextBox 24"/>
+          <p:cNvSpPr txBox="1"/>
+          <p:nvPr/>
+        </p:nvSpPr>
+        <p:spPr>
+          <a:xfrm>
+            <a:off x="6399609" y="10215562"/>
+            <a:ext cx="1752600" cy="152400"/>
+          </a:xfrm>
+          <a:prstGeom prst="rect">
+            <a:avLst/>
+          </a:prstGeom>
+          <a:noFill/>
+        </p:spPr>
+        <p:txBody>
+          <a:bodyPr wrap="none" anchor="t" lIns="0" rIns="0" tIns="0" bIns="0"/>
+          <a:lstStyle/>
+          <a:p>
+            <a:pPr algn="ctr"/>
+            <a:r>
+              <a:rPr sz="750" i="0" b="0" spc="195">
+                <a:solidFill>
+                  <a:srgbClr val="8A867E"/>
+                </a:solidFill>
+                <a:latin typeface="Poppins"/>
+                <a:ea typeface="Poppins"/>
+                <a:cs typeface="Poppins"/>
+              </a:rPr>
+              <a:t>SQ FT</a:t>
+            </a:r>
+          </a:p>
+        </p:txBody>
+      </p:sp>
+      <p:sp>
+        <p:nvSpPr>
+          <p:cNvPr id="26" name="TextBox 25"/>
+          <p:cNvSpPr txBox="1"/>
+          <p:nvPr/>
+        </p:nvSpPr>
+        <p:spPr>
+          <a:xfrm>
+            <a:off x="9505504" y="9729788"/>
+            <a:ext cx="1143000" cy="447675"/>
+          </a:xfrm>
+          <a:prstGeom prst="rect">
+            <a:avLst/>
+          </a:prstGeom>
+          <a:noFill/>
+        </p:spPr>
+        <p:txBody>
+          <a:bodyPr wrap="none" anchor="t" lIns="0" rIns="0" tIns="0" bIns="0"/>
+          <a:lstStyle/>
+          <a:p>
+            <a:pPr algn="ctr"/>
+            <a:r>
+              <a:rPr sz="3000" i="0" b="0">
+                <a:solidFill>
+                  <a:srgbClr val="33322E"/>
+                </a:solidFill>
+                <a:latin typeface="Cormorant Garamond"/>
+                <a:ea typeface="Cormorant Garamond"/>
+                <a:cs typeface="Cormorant Garamond"/>
+              </a:rPr>
+              <a:t>0.3</a:t>
+            </a:r>
+          </a:p>
+        </p:txBody>
+      </p:sp>
+      <p:sp>
+        <p:nvSpPr>
+          <p:cNvPr id="27" name="TextBox 26"/>
+          <p:cNvSpPr txBox="1"/>
+          <p:nvPr/>
+        </p:nvSpPr>
+        <p:spPr>
+          <a:xfrm>
+            <a:off x="9505504" y="10215562"/>
+            <a:ext cx="1143000" cy="152400"/>
+          </a:xfrm>
+          <a:prstGeom prst="rect">
+            <a:avLst/>
+          </a:prstGeom>
+          <a:noFill/>
+        </p:spPr>
+        <p:txBody>
+          <a:bodyPr wrap="none" anchor="t" lIns="0" rIns="0" tIns="0" bIns="0"/>
+          <a:lstStyle/>
+          <a:p>
+            <a:pPr algn="ctr"/>
+            <a:r>
+              <a:rPr sz="750" i="0" b="0" spc="195">
+                <a:solidFill>
+                  <a:srgbClr val="8A867E"/>
+                </a:solidFill>
+                <a:latin typeface="Poppins"/>
+                <a:ea typeface="Poppins"/>
+                <a:cs typeface="Poppins"/>
+              </a:rPr>
+              <a:t>ACRE</a:t>
+            </a:r>
+          </a:p>
+        </p:txBody>
+      </p:sp>
+      <p:sp>
+        <p:nvSpPr>
+          <p:cNvPr id="28" name="TextBox 27"/>
+          <p:cNvSpPr txBox="1"/>
+          <p:nvPr/>
+        </p:nvSpPr>
+        <p:spPr>
+          <a:xfrm>
+            <a:off x="-2614612" y="10948988"/>
+            <a:ext cx="17373600" cy="190500"/>
+          </a:xfrm>
+          <a:prstGeom prst="rect">
+            <a:avLst/>
+          </a:prstGeom>
+          <a:noFill/>
+        </p:spPr>
+        <p:txBody>
+          <a:bodyPr wrap="none" anchor="t" lIns="0" rIns="0" tIns="0" bIns="0"/>
+          <a:lstStyle/>
+          <a:p>
+            <a:pPr algn="ctr"/>
+            <a:r>
+              <a:rPr sz="975" i="0" b="0" spc="292">
+                <a:solidFill>
+                  <a:srgbClr val="97A98C"/>
+                </a:solidFill>
+                <a:latin typeface="Poppins"/>
+                <a:ea typeface="Poppins"/>
+                <a:cs typeface="Poppins"/>
+              </a:rPr>
+              <a:t>SATURDAY JUNE 14 · 1–4 PM</a:t>
+            </a:r>
+          </a:p>
+        </p:txBody>
+      </p:sp>
+      <p:sp>
+        <p:nvSpPr>
+          <p:cNvPr id="29" name="TextBox 28"/>
+          <p:cNvSpPr txBox="1"/>
+          <p:nvPr/>
+        </p:nvSpPr>
+        <p:spPr>
+          <a:xfrm>
+            <a:off x="842962" y="14658975"/>
+            <a:ext cx="792480" cy="171450"/>
+          </a:xfrm>
+          <a:prstGeom prst="rect">
+            <a:avLst/>
+          </a:prstGeom>
+          <a:noFill/>
+        </p:spPr>
+        <p:txBody>
+          <a:bodyPr wrap="none" anchor="t" lIns="0" rIns="0" tIns="0" bIns="0"/>
+          <a:lstStyle/>
+          <a:p>
+            <a:pPr algn="l">
+              <a:lnSpc>
+                <a:spcPct val="100000"/>
+              </a:lnSpc>
+            </a:pPr>
+            <a:r>
+              <a:rPr sz="1350" i="0" b="0">
+                <a:solidFill>
+                  <a:srgbClr val="97A98C"/>
+                </a:solidFill>
+                <a:latin typeface="Cormorant Garamond"/>
+                <a:ea typeface="Cormorant Garamond"/>
+                <a:cs typeface="Cormorant Garamond"/>
+              </a:rPr>
+              <a:t>ME</a:t>
+            </a:r>
+          </a:p>
+        </p:txBody>
+      </p:sp>
+      <p:sp>
+        <p:nvSpPr>
+          <p:cNvPr id="30" name="TextBox 29"/>
+          <p:cNvSpPr txBox="1"/>
+          <p:nvPr/>
+        </p:nvSpPr>
+        <p:spPr>
+          <a:xfrm>
+            <a:off x="1314450" y="14544675"/>
+            <a:ext cx="3310414" cy="247650"/>
+          </a:xfrm>
+          <a:prstGeom prst="rect">
+            <a:avLst/>
+          </a:prstGeom>
+          <a:noFill/>
+        </p:spPr>
+        <p:txBody>
+          <a:bodyPr wrap="none" anchor="t" lIns="0" rIns="0" tIns="0" bIns="0"/>
+          <a:lstStyle/>
+          <a:p>
+            <a:pPr algn="l"/>
+            <a:r>
+              <a:rPr sz="1650" i="0" b="0">
+                <a:solidFill>
+                  <a:srgbClr val="33322E"/>
+                </a:solidFill>
+                <a:latin typeface="Cormorant Garamond"/>
+                <a:ea typeface="Cormorant Garamond"/>
+                <a:cs typeface="Cormorant Garamond"/>
+              </a:rPr>
+              <a:t>Maya Ellison</a:t>
+            </a:r>
+          </a:p>
+        </p:txBody>
+      </p:sp>
+      <p:sp>
+        <p:nvSpPr>
+          <p:cNvPr id="31" name="TextBox 30"/>
+          <p:cNvSpPr txBox="1"/>
+          <p:nvPr/>
+        </p:nvSpPr>
+        <p:spPr>
+          <a:xfrm>
+            <a:off x="1314450" y="14820900"/>
+            <a:ext cx="3310414" cy="123825"/>
+          </a:xfrm>
+          <a:prstGeom prst="rect">
+            <a:avLst/>
+          </a:prstGeom>
+          <a:noFill/>
+        </p:spPr>
+        <p:txBody>
+          <a:bodyPr wrap="none" anchor="t" lIns="0" rIns="0" tIns="0" bIns="0"/>
+          <a:lstStyle/>
+          <a:p>
+            <a:pPr algn="l"/>
+            <a:r>
+              <a:rPr sz="675" i="0" b="0" spc="202">
+                <a:solidFill>
+                  <a:srgbClr val="8A867E"/>
+                </a:solidFill>
+                <a:latin typeface="Poppins"/>
+                <a:ea typeface="Poppins"/>
+                <a:cs typeface="Poppins"/>
+              </a:rPr>
+              <a:t>REALTOR®  |  MODERN LIVING</a:t>
+            </a:r>
+          </a:p>
+        </p:txBody>
+      </p:sp>
+      <p:sp>
+        <p:nvSpPr>
+          <p:cNvPr id="32" name="TextBox 31"/>
+          <p:cNvSpPr txBox="1"/>
+          <p:nvPr/>
+        </p:nvSpPr>
+        <p:spPr>
+          <a:xfrm>
+            <a:off x="9019699" y="14582775"/>
+            <a:ext cx="2362676" cy="323850"/>
+          </a:xfrm>
+          <a:prstGeom prst="rect">
+            <a:avLst/>
+          </a:prstGeom>
+          <a:noFill/>
+        </p:spPr>
+        <p:txBody>
+          <a:bodyPr wrap="none" anchor="t" lIns="0" rIns="0" tIns="0" bIns="0"/>
+          <a:lstStyle/>
+          <a:p>
+            <a:pPr algn="r"/>
+            <a:r>
+              <a:rPr sz="825" i="0" b="0" spc="148">
+                <a:solidFill>
+                  <a:srgbClr val="8A867E"/>
+                </a:solidFill>
+                <a:latin typeface="Poppins"/>
+                <a:ea typeface="Poppins"/>
+                <a:cs typeface="Poppins"/>
+              </a:rPr>
+              <a:t>(512) 555-0147</a:t>
+            </a:r>
+          </a:p>
+          <a:p>
+            <a:pPr algn="r"/>
+            <a:r>
+              <a:rPr sz="825" i="0" b="0" spc="148">
+                <a:solidFill>
+                  <a:srgbClr val="8A867E"/>
+                </a:solidFill>
+                <a:latin typeface="Poppins"/>
+                <a:ea typeface="Poppins"/>
+                <a:cs typeface="Poppins"/>
+              </a:rPr>
+              <a:t>MAYAELLISON.COM</a:t>
+            </a:r>
+          </a:p>
+        </p:txBody>
+      </p:sp>
     </p:spTree>
   </p:cSld>
   <p:clrMapOvr>

--- a/bright-31-flyer.pptx
+++ b/bright-31-flyer.pptx
@@ -3228,14 +3228,14 @@
         </p:nvSpPr>
         <p:spPr>
           <a:xfrm>
-            <a:off x="762000" y="2671762"/>
-            <a:ext cx="10620375" cy="5334000"/>
+            <a:off x="762000" y="9472612"/>
+            <a:ext cx="10620375" cy="9525"/>
           </a:xfrm>
           <a:prstGeom prst="rect">
             <a:avLst/>
           </a:prstGeom>
           <a:solidFill>
-            <a:srgbClr val="EDE7DD"/>
+            <a:srgbClr val="C9D2C2"/>
           </a:solidFill>
           <a:ln>
             <a:noFill/>
@@ -3272,14 +3272,14 @@
         </p:nvSpPr>
         <p:spPr>
           <a:xfrm>
-            <a:off x="762000" y="2671762"/>
+            <a:off x="762000" y="10615612"/>
             <a:ext cx="10620375" cy="9525"/>
           </a:xfrm>
           <a:prstGeom prst="rect">
             <a:avLst/>
           </a:prstGeom>
           <a:solidFill>
-            <a:srgbClr val="CED6C7"/>
+            <a:srgbClr val="C9D2C2"/>
           </a:solidFill>
           <a:ln>
             <a:noFill/>
@@ -3316,14 +3316,14 @@
         </p:nvSpPr>
         <p:spPr>
           <a:xfrm>
-            <a:off x="762000" y="7996238"/>
+            <a:off x="762000" y="14297025"/>
             <a:ext cx="10620375" cy="9525"/>
           </a:xfrm>
           <a:prstGeom prst="rect">
             <a:avLst/>
           </a:prstGeom>
           <a:solidFill>
-            <a:srgbClr val="CED6C7"/>
+            <a:srgbClr val="C9D2C2"/>
           </a:solidFill>
           <a:ln>
             <a:noFill/>
@@ -3354,23 +3354,23 @@
       </p:sp>
       <p:sp>
         <p:nvSpPr>
-          <p:cNvPr id="8" name="Rectangle 7"/>
+          <p:cNvPr id="8" name="Oval 7"/>
           <p:cNvSpPr/>
           <p:nvPr/>
         </p:nvSpPr>
         <p:spPr>
           <a:xfrm>
-            <a:off x="762000" y="2671762"/>
-            <a:ext cx="9525" cy="5334000"/>
-          </a:xfrm>
-          <a:prstGeom prst="rect">
+            <a:off x="762000" y="14535150"/>
+            <a:ext cx="419100" cy="419100"/>
+          </a:xfrm>
+          <a:prstGeom prst="ellipse">
             <a:avLst/>
           </a:prstGeom>
-          <a:solidFill>
-            <a:srgbClr val="CED6C7"/>
-          </a:solidFill>
-          <a:ln>
-            <a:noFill/>
+          <a:noFill/>
+          <a:ln w="9525">
+            <a:solidFill>
+              <a:srgbClr val="97A98C"/>
+            </a:solidFill>
           </a:ln>
           <a:effectLst/>
         </p:spPr>
@@ -3398,227 +3398,7 @@
       </p:sp>
       <p:sp>
         <p:nvSpPr>
-          <p:cNvPr id="9" name="Rectangle 8"/>
-          <p:cNvSpPr/>
-          <p:nvPr/>
-        </p:nvSpPr>
-        <p:spPr>
-          <a:xfrm>
-            <a:off x="11372850" y="2671762"/>
-            <a:ext cx="9525" cy="5334000"/>
-          </a:xfrm>
-          <a:prstGeom prst="rect">
-            <a:avLst/>
-          </a:prstGeom>
-          <a:solidFill>
-            <a:srgbClr val="CED6C7"/>
-          </a:solidFill>
-          <a:ln>
-            <a:noFill/>
-          </a:ln>
-          <a:effectLst/>
-        </p:spPr>
-        <p:style>
-          <a:lnRef idx="1">
-            <a:schemeClr val="accent1"/>
-          </a:lnRef>
-          <a:fillRef idx="3">
-            <a:schemeClr val="accent1"/>
-          </a:fillRef>
-          <a:effectRef idx="2">
-            <a:schemeClr val="accent1"/>
-          </a:effectRef>
-          <a:fontRef idx="minor">
-            <a:schemeClr val="lt1"/>
-          </a:fontRef>
-        </p:style>
-        <p:txBody>
-          <a:bodyPr rtlCol="0" anchor="ctr"/>
-          <a:lstStyle/>
-          <a:p>
-            <a:pPr algn="ctr"/>
-          </a:p>
-        </p:txBody>
-      </p:sp>
-      <p:sp>
-        <p:nvSpPr>
-          <p:cNvPr id="10" name="Rectangle 9"/>
-          <p:cNvSpPr/>
-          <p:nvPr/>
-        </p:nvSpPr>
-        <p:spPr>
-          <a:xfrm>
-            <a:off x="762000" y="9472612"/>
-            <a:ext cx="10620375" cy="9525"/>
-          </a:xfrm>
-          <a:prstGeom prst="rect">
-            <a:avLst/>
-          </a:prstGeom>
-          <a:solidFill>
-            <a:srgbClr val="C9D2C2"/>
-          </a:solidFill>
-          <a:ln>
-            <a:noFill/>
-          </a:ln>
-          <a:effectLst/>
-        </p:spPr>
-        <p:style>
-          <a:lnRef idx="1">
-            <a:schemeClr val="accent1"/>
-          </a:lnRef>
-          <a:fillRef idx="3">
-            <a:schemeClr val="accent1"/>
-          </a:fillRef>
-          <a:effectRef idx="2">
-            <a:schemeClr val="accent1"/>
-          </a:effectRef>
-          <a:fontRef idx="minor">
-            <a:schemeClr val="lt1"/>
-          </a:fontRef>
-        </p:style>
-        <p:txBody>
-          <a:bodyPr rtlCol="0" anchor="ctr"/>
-          <a:lstStyle/>
-          <a:p>
-            <a:pPr algn="ctr"/>
-          </a:p>
-        </p:txBody>
-      </p:sp>
-      <p:sp>
-        <p:nvSpPr>
-          <p:cNvPr id="11" name="Rectangle 10"/>
-          <p:cNvSpPr/>
-          <p:nvPr/>
-        </p:nvSpPr>
-        <p:spPr>
-          <a:xfrm>
-            <a:off x="762000" y="10615612"/>
-            <a:ext cx="10620375" cy="9525"/>
-          </a:xfrm>
-          <a:prstGeom prst="rect">
-            <a:avLst/>
-          </a:prstGeom>
-          <a:solidFill>
-            <a:srgbClr val="C9D2C2"/>
-          </a:solidFill>
-          <a:ln>
-            <a:noFill/>
-          </a:ln>
-          <a:effectLst/>
-        </p:spPr>
-        <p:style>
-          <a:lnRef idx="1">
-            <a:schemeClr val="accent1"/>
-          </a:lnRef>
-          <a:fillRef idx="3">
-            <a:schemeClr val="accent1"/>
-          </a:fillRef>
-          <a:effectRef idx="2">
-            <a:schemeClr val="accent1"/>
-          </a:effectRef>
-          <a:fontRef idx="minor">
-            <a:schemeClr val="lt1"/>
-          </a:fontRef>
-        </p:style>
-        <p:txBody>
-          <a:bodyPr rtlCol="0" anchor="ctr"/>
-          <a:lstStyle/>
-          <a:p>
-            <a:pPr algn="ctr"/>
-          </a:p>
-        </p:txBody>
-      </p:sp>
-      <p:sp>
-        <p:nvSpPr>
-          <p:cNvPr id="12" name="Rectangle 11"/>
-          <p:cNvSpPr/>
-          <p:nvPr/>
-        </p:nvSpPr>
-        <p:spPr>
-          <a:xfrm>
-            <a:off x="762000" y="14297025"/>
-            <a:ext cx="10620375" cy="9525"/>
-          </a:xfrm>
-          <a:prstGeom prst="rect">
-            <a:avLst/>
-          </a:prstGeom>
-          <a:solidFill>
-            <a:srgbClr val="C9D2C2"/>
-          </a:solidFill>
-          <a:ln>
-            <a:noFill/>
-          </a:ln>
-          <a:effectLst/>
-        </p:spPr>
-        <p:style>
-          <a:lnRef idx="1">
-            <a:schemeClr val="accent1"/>
-          </a:lnRef>
-          <a:fillRef idx="3">
-            <a:schemeClr val="accent1"/>
-          </a:fillRef>
-          <a:effectRef idx="2">
-            <a:schemeClr val="accent1"/>
-          </a:effectRef>
-          <a:fontRef idx="minor">
-            <a:schemeClr val="lt1"/>
-          </a:fontRef>
-        </p:style>
-        <p:txBody>
-          <a:bodyPr rtlCol="0" anchor="ctr"/>
-          <a:lstStyle/>
-          <a:p>
-            <a:pPr algn="ctr"/>
-          </a:p>
-        </p:txBody>
-      </p:sp>
-      <p:sp>
-        <p:nvSpPr>
-          <p:cNvPr id="13" name="Oval 12"/>
-          <p:cNvSpPr/>
-          <p:nvPr/>
-        </p:nvSpPr>
-        <p:spPr>
-          <a:xfrm>
-            <a:off x="762000" y="14535150"/>
-            <a:ext cx="419100" cy="419100"/>
-          </a:xfrm>
-          <a:prstGeom prst="ellipse">
-            <a:avLst/>
-          </a:prstGeom>
-          <a:noFill/>
-          <a:ln w="9525">
-            <a:solidFill>
-              <a:srgbClr val="97A98C"/>
-            </a:solidFill>
-          </a:ln>
-          <a:effectLst/>
-        </p:spPr>
-        <p:style>
-          <a:lnRef idx="1">
-            <a:schemeClr val="accent1"/>
-          </a:lnRef>
-          <a:fillRef idx="3">
-            <a:schemeClr val="accent1"/>
-          </a:fillRef>
-          <a:effectRef idx="2">
-            <a:schemeClr val="accent1"/>
-          </a:effectRef>
-          <a:fontRef idx="minor">
-            <a:schemeClr val="lt1"/>
-          </a:fontRef>
-        </p:style>
-        <p:txBody>
-          <a:bodyPr rtlCol="0" anchor="ctr"/>
-          <a:lstStyle/>
-          <a:p>
-            <a:pPr algn="ctr"/>
-          </a:p>
-        </p:txBody>
-      </p:sp>
-      <p:sp>
-        <p:nvSpPr>
-          <p:cNvPr id="14" name="TextBox 13"/>
+          <p:cNvPr id="9" name="TextBox 8"/>
           <p:cNvSpPr txBox="1"/>
           <p:nvPr/>
         </p:nvSpPr>
@@ -3653,7 +3433,7 @@
       </p:sp>
       <p:sp>
         <p:nvSpPr>
-          <p:cNvPr id="15" name="TextBox 14"/>
+          <p:cNvPr id="10" name="TextBox 9"/>
           <p:cNvSpPr txBox="1"/>
           <p:nvPr/>
         </p:nvSpPr>
@@ -3692,42 +3472,7 @@
       </p:sp>
       <p:sp>
         <p:nvSpPr>
-          <p:cNvPr id="16" name="TextBox 15"/>
-          <p:cNvSpPr txBox="1"/>
-          <p:nvPr/>
-        </p:nvSpPr>
-        <p:spPr>
-          <a:xfrm>
-            <a:off x="5349180" y="5253038"/>
-            <a:ext cx="2694384" cy="171450"/>
-          </a:xfrm>
-          <a:prstGeom prst="rect">
-            <a:avLst/>
-          </a:prstGeom>
-          <a:noFill/>
-        </p:spPr>
-        <p:txBody>
-          <a:bodyPr wrap="none" anchor="t" lIns="0" rIns="0" tIns="0" bIns="0"/>
-          <a:lstStyle/>
-          <a:p>
-            <a:pPr algn="l"/>
-            <a:r>
-              <a:rPr sz="900" i="0" b="0" spc="270">
-                <a:solidFill>
-                  <a:srgbClr val="8A867E"/>
-                </a:solidFill>
-                <a:latin typeface="Poppins"/>
-                <a:ea typeface="Poppins"/>
-                <a:cs typeface="Poppins"/>
-              </a:rPr>
-              <a:t>PROPERTY PHOTO</a:t>
-            </a:r>
-          </a:p>
-        </p:txBody>
-      </p:sp>
-      <p:sp>
-        <p:nvSpPr>
-          <p:cNvPr id="17" name="TextBox 16"/>
+          <p:cNvPr id="11" name="TextBox 10"/>
           <p:cNvSpPr txBox="1"/>
           <p:nvPr/>
         </p:nvSpPr>
@@ -3762,7 +3507,7 @@
       </p:sp>
       <p:sp>
         <p:nvSpPr>
-          <p:cNvPr id="18" name="TextBox 17"/>
+          <p:cNvPr id="12" name="TextBox 11"/>
           <p:cNvSpPr txBox="1"/>
           <p:nvPr/>
         </p:nvSpPr>
@@ -3797,7 +3542,7 @@
       </p:sp>
       <p:sp>
         <p:nvSpPr>
-          <p:cNvPr id="19" name="TextBox 18"/>
+          <p:cNvPr id="13" name="TextBox 12"/>
           <p:cNvSpPr txBox="1"/>
           <p:nvPr/>
         </p:nvSpPr>
@@ -3832,7 +3577,7 @@
       </p:sp>
       <p:sp>
         <p:nvSpPr>
-          <p:cNvPr id="20" name="TextBox 19"/>
+          <p:cNvPr id="14" name="TextBox 13"/>
           <p:cNvSpPr txBox="1"/>
           <p:nvPr/>
         </p:nvSpPr>
@@ -3867,7 +3612,7 @@
       </p:sp>
       <p:sp>
         <p:nvSpPr>
-          <p:cNvPr id="21" name="TextBox 20"/>
+          <p:cNvPr id="15" name="TextBox 14"/>
           <p:cNvSpPr txBox="1"/>
           <p:nvPr/>
         </p:nvSpPr>
@@ -3902,7 +3647,7 @@
       </p:sp>
       <p:sp>
         <p:nvSpPr>
-          <p:cNvPr id="22" name="TextBox 21"/>
+          <p:cNvPr id="16" name="TextBox 15"/>
           <p:cNvSpPr txBox="1"/>
           <p:nvPr/>
         </p:nvSpPr>
@@ -3937,7 +3682,7 @@
       </p:sp>
       <p:sp>
         <p:nvSpPr>
-          <p:cNvPr id="23" name="TextBox 22"/>
+          <p:cNvPr id="17" name="TextBox 16"/>
           <p:cNvSpPr txBox="1"/>
           <p:nvPr/>
         </p:nvSpPr>
@@ -3972,7 +3717,7 @@
       </p:sp>
       <p:sp>
         <p:nvSpPr>
-          <p:cNvPr id="24" name="TextBox 23"/>
+          <p:cNvPr id="18" name="TextBox 17"/>
           <p:cNvSpPr txBox="1"/>
           <p:nvPr/>
         </p:nvSpPr>
@@ -4007,7 +3752,7 @@
       </p:sp>
       <p:sp>
         <p:nvSpPr>
-          <p:cNvPr id="25" name="TextBox 24"/>
+          <p:cNvPr id="19" name="TextBox 18"/>
           <p:cNvSpPr txBox="1"/>
           <p:nvPr/>
         </p:nvSpPr>
@@ -4042,7 +3787,7 @@
       </p:sp>
       <p:sp>
         <p:nvSpPr>
-          <p:cNvPr id="26" name="TextBox 25"/>
+          <p:cNvPr id="20" name="TextBox 19"/>
           <p:cNvSpPr txBox="1"/>
           <p:nvPr/>
         </p:nvSpPr>
@@ -4077,7 +3822,7 @@
       </p:sp>
       <p:sp>
         <p:nvSpPr>
-          <p:cNvPr id="27" name="TextBox 26"/>
+          <p:cNvPr id="21" name="TextBox 20"/>
           <p:cNvSpPr txBox="1"/>
           <p:nvPr/>
         </p:nvSpPr>
@@ -4112,7 +3857,7 @@
       </p:sp>
       <p:sp>
         <p:nvSpPr>
-          <p:cNvPr id="28" name="TextBox 27"/>
+          <p:cNvPr id="22" name="TextBox 21"/>
           <p:cNvSpPr txBox="1"/>
           <p:nvPr/>
         </p:nvSpPr>
@@ -4147,7 +3892,7 @@
       </p:sp>
       <p:sp>
         <p:nvSpPr>
-          <p:cNvPr id="29" name="TextBox 28"/>
+          <p:cNvPr id="23" name="TextBox 22"/>
           <p:cNvSpPr txBox="1"/>
           <p:nvPr/>
         </p:nvSpPr>
@@ -4186,7 +3931,7 @@
       </p:sp>
       <p:sp>
         <p:nvSpPr>
-          <p:cNvPr id="30" name="TextBox 29"/>
+          <p:cNvPr id="24" name="TextBox 23"/>
           <p:cNvSpPr txBox="1"/>
           <p:nvPr/>
         </p:nvSpPr>
@@ -4221,7 +3966,7 @@
       </p:sp>
       <p:sp>
         <p:nvSpPr>
-          <p:cNvPr id="31" name="TextBox 30"/>
+          <p:cNvPr id="25" name="TextBox 24"/>
           <p:cNvSpPr txBox="1"/>
           <p:nvPr/>
         </p:nvSpPr>
@@ -4256,7 +4001,7 @@
       </p:sp>
       <p:sp>
         <p:nvSpPr>
-          <p:cNvPr id="32" name="TextBox 31"/>
+          <p:cNvPr id="26" name="TextBox 25"/>
           <p:cNvSpPr txBox="1"/>
           <p:nvPr/>
         </p:nvSpPr>
@@ -4303,6 +4048,30 @@
           </a:p>
         </p:txBody>
       </p:sp>
+      <p:pic>
+        <p:nvPicPr>
+          <p:cNvPr id="27" name="Picture 26" descr="bright-31-flyer_24.png"/>
+          <p:cNvPicPr>
+            <a:picLocks noChangeAspect="1"/>
+          </p:cNvPicPr>
+          <p:nvPr/>
+        </p:nvPicPr>
+        <p:blipFill>
+          <a:blip r:embed="rId2"/>
+          <a:stretch>
+            <a:fillRect/>
+          </a:stretch>
+        </p:blipFill>
+        <p:spPr>
+          <a:xfrm>
+            <a:off x="762000" y="2671762"/>
+            <a:ext cx="10620375" cy="5334000"/>
+          </a:xfrm>
+          <a:prstGeom prst="rect">
+            <a:avLst/>
+          </a:prstGeom>
+        </p:spPr>
+      </p:pic>
     </p:spTree>
   </p:cSld>
   <p:clrMapOvr>
